--- a/ppt/Git与GitHub从入门到实战.pptx
+++ b/ppt/Git与GitHub从入门到实战.pptx
@@ -13854,4 +13854,243 @@
     <a:masterClrMapping/>
   </p:clrMapOvr>
 </p:sld>
+</file>
+
+<file path=ppt/theme/theme1.xml><?xml version="1.0" encoding="utf-8"?>
+<a:theme xmlns:a="http://schemas.openxmlformats.org/drawingml/2006/main" name="GitTutorial">
+  <a:themeElements>
+    <a:clrScheme name="GitTutorial">
+      <a:dk1>
+        <a:sysClr val="windowText" lastClr="000000"/>
+      </a:dk1>
+      <a:lt1>
+        <a:sysClr val="window" lastClr="FFFFFF"/>
+      </a:lt1>
+      <a:dk2>
+        <a:srgbClr val="0B1020"/>
+      </a:dk2>
+      <a:lt2>
+        <a:srgbClr val="111A2C"/>
+      </a:lt2>
+      <a:accent1>
+        <a:srgbClr val="4DD4FF"/>
+      </a:accent1>
+      <a:accent2>
+        <a:srgbClr val="FFD166"/>
+      </a:accent2>
+      <a:accent3>
+        <a:srgbClr val="63F5A0"/>
+      </a:accent3>
+      <a:accent4>
+        <a:srgbClr val="9FE8FF"/>
+      </a:accent4>
+      <a:accent5>
+        <a:srgbClr val="7FE9FF"/>
+      </a:accent5>
+      <a:accent6>
+        <a:srgbClr val="6C7A99"/>
+      </a:accent6>
+      <a:hlink>
+        <a:srgbClr val="4DD4FF"/>
+      </a:hlink>
+      <a:folHlink>
+        <a:srgbClr val="63F5A0"/>
+      </a:folHlink>
+    </a:clrScheme>
+    <a:fontScheme name="GitTutorial">
+      <a:majorFont>
+        <a:latin typeface="Microsoft YaHei"/>
+        <a:ea typeface="Microsoft YaHei"/>
+        <a:cs typeface=""/>
+        <a:font script="zh-CN" typeface="宋体"/>
+        <a:font script="ja-JP" typeface="ＭＳ Ｐゴシック"/>
+        <a:font script="ko-KR" typeface="맑은 고딕"/>
+        <a:font script="zh-TW" typeface="新細明體"/>
+        <a:font script="ru-RU" typeface="Arial"/>
+        <a:font script="en-US" typeface="Microsoft YaHei"/>
+        <a:font script="ar-SA" typeface="Arial"/>
+      </a:majorFont>
+      <a:minorFont>
+        <a:latin typeface="Microsoft YaHei"/>
+        <a:ea typeface="Microsoft YaHei"/>
+        <a:cs typeface=""/>
+        <a:font script="zh-CN" typeface="宋体"/>
+        <a:font script="ja-JP" typeface="ＭＳ Ｐゴシック"/>
+        <a:font script="ko-KR" typeface="맑은 고딕"/>
+        <a:font script="zh-TW" typeface="新細明體"/>
+        <a:font script="ru-RU" typeface="Arial"/>
+        <a:font script="en-US" typeface="Microsoft YaHei"/>
+        <a:font script="ar-SA" typeface="Arial"/>
+      </a:minorFont>
+    </a:fontScheme>
+    <a:fmtScheme name="GitTutorial">
+      <a:fillStyleLst>
+        <a:solidFill>
+          <a:schemeClr val="phClr"/>
+        </a:solidFill>
+        <a:gradFill rotWithShape="1">
+          <a:gsLst>
+            <a:gs pos="0">
+              <a:schemeClr val="phClr">
+                <a:tint val="50000"/>
+                <a:satMod val="300000"/>
+              </a:schemeClr>
+            </a:gs>
+            <a:gs pos="35000">
+              <a:schemeClr val="phClr">
+                <a:tint val="37000"/>
+                <a:satMod val="300000"/>
+              </a:schemeClr>
+            </a:gs>
+            <a:gs pos="100000">
+              <a:schemeClr val="phClr">
+                <a:tint val="15000"/>
+                <a:satMod val="350000"/>
+              </a:schemeClr>
+            </a:gs>
+          </a:gsLst>
+          <a:lin ang="16200000" scaled="1"/>
+        </a:gradFill>
+        <a:gradFill rotWithShape="1">
+          <a:gsLst>
+            <a:gs pos="0">
+              <a:schemeClr val="phClr">
+                <a:shade val="51000"/>
+                <a:satMod val="130000"/>
+              </a:schemeClr>
+            </a:gs>
+            <a:gs pos="80000">
+              <a:schemeClr val="phClr">
+                <a:shade val="93000"/>
+                <a:satMod val="130000"/>
+              </a:schemeClr>
+            </a:gs>
+            <a:gs pos="100000">
+              <a:schemeClr val="phClr">
+                <a:shade val="94000"/>
+                <a:satMod val="135000"/>
+              </a:schemeClr>
+            </a:gs>
+          </a:gsLst>
+          <a:lin ang="16200000" scaled="0"/>
+        </a:gradFill>
+      </a:fillStyleLst>
+      <a:lnStyleLst>
+        <a:ln w="9525" cap="flat" cmpd="sng" algn="ctr">
+          <a:solidFill>
+            <a:schemeClr val="phClr">
+              <a:shade val="95000"/>
+              <a:satMod val="105000"/>
+            </a:schemeClr>
+          </a:solidFill>
+          <a:prstDash val="solid"/>
+        </a:ln>
+        <a:ln w="25400" cap="flat" cmpd="sng" algn="ctr">
+          <a:solidFill>
+            <a:schemeClr val="phClr"/>
+          </a:solidFill>
+          <a:prstDash val="solid"/>
+        </a:ln>
+        <a:ln w="38100" cap="flat" cmpd="sng" algn="ctr">
+          <a:solidFill>
+            <a:schemeClr val="phClr"/>
+          </a:solidFill>
+          <a:prstDash val="solid"/>
+        </a:ln>
+      </a:lnStyleLst>
+      <a:effectStyleLst>
+        <a:effectStyle>
+          <a:effectLst>
+            <a:outerShdw blurRad="40000" dist="20000" dir="5400000" rotWithShape="0">
+              <a:srgbClr val="000000">
+                <a:alpha val="38000"/>
+              </a:srgbClr>
+            </a:outerShdw>
+          </a:effectLst>
+        </a:effectStyle>
+        <a:effectStyle>
+          <a:effectLst>
+            <a:outerShdw blurRad="40000" dist="23000" dir="5400000" rotWithShape="0">
+              <a:srgbClr val="000000">
+                <a:alpha val="35000"/>
+              </a:srgbClr>
+            </a:outerShdw>
+          </a:effectLst>
+        </a:effectStyle>
+        <a:effectStyle>
+          <a:effectLst>
+            <a:outerShdw blurRad="40000" dist="23000" dir="5400000" rotWithShape="0">
+              <a:srgbClr val="000000">
+                <a:alpha val="35000"/>
+              </a:srgbClr>
+            </a:outerShdw>
+          </a:effectLst>
+          <a:scene3d>
+            <a:camera prst="orthographicFront">
+              <a:rot lat="0" lon="0" rev="0"/>
+            </a:camera>
+            <a:lightRig rig="threePt" dir="t">
+              <a:rot lat="0" lon="0" rev="1200000"/>
+            </a:lightRig>
+          </a:scene3d>
+          <a:sp3d>
+            <a:bevelT w="63500" h="25400"/>
+          </a:sp3d>
+        </a:effectStyle>
+      </a:effectStyleLst>
+      <a:bgFillStyleLst>
+        <a:solidFill>
+          <a:schemeClr val="phClr"/>
+        </a:solidFill>
+        <a:gradFill rotWithShape="1">
+          <a:gsLst>
+            <a:gs pos="0">
+              <a:schemeClr val="phClr">
+                <a:tint val="40000"/>
+                <a:satMod val="350000"/>
+              </a:schemeClr>
+            </a:gs>
+            <a:gs pos="40000">
+              <a:schemeClr val="phClr">
+                <a:tint val="45000"/>
+                <a:shade val="99000"/>
+                <a:satMod val="350000"/>
+              </a:schemeClr>
+            </a:gs>
+            <a:gs pos="100000">
+              <a:schemeClr val="phClr">
+                <a:shade val="20000"/>
+                <a:satMod val="255000"/>
+              </a:schemeClr>
+            </a:gs>
+          </a:gsLst>
+          <a:path path="circle">
+            <a:fillToRect l="50000" t="-80000" r="50000" b="180000"/>
+          </a:path>
+        </a:gradFill>
+        <a:gradFill rotWithShape="1">
+          <a:gsLst>
+            <a:gs pos="0">
+              <a:schemeClr val="phClr">
+                <a:tint val="80000"/>
+                <a:satMod val="300000"/>
+              </a:schemeClr>
+            </a:gs>
+            <a:gs pos="100000">
+              <a:schemeClr val="phClr">
+                <a:shade val="30000"/>
+                <a:satMod val="200000"/>
+              </a:schemeClr>
+            </a:gs>
+          </a:gsLst>
+          <a:path path="circle">
+            <a:fillToRect l="50000" t="50000" r="50000" b="50000"/>
+          </a:path>
+        </a:gradFill>
+      </a:bgFillStyleLst>
+    </a:fmtScheme>
+  </a:themeElements>
+  <a:objectDefaults/>
+  <a:extraClrSchemeLst/>
+</a:theme>
 </file>